--- a/Presentation/Digital Lifestyle Project Presentation.pptx
+++ b/Presentation/Digital Lifestyle Project Presentation.pptx
@@ -259,7 +259,7 @@
       <p15:sldGuideLst xmlns:p15="http://schemas.microsoft.com/office/powerpoint/2012/main"/>
     </p:ext>
     <p:ext uri="GoogleSlidesCustomDataVersion2">
-      <go:slidesCustomData xmlns:go="http://customooxmlschemas.google.com/" xmlns:ahyp="http://schemas.microsoft.com/office/drawing/2018/hyperlinkcolor" xmlns:p15="http://schemas.microsoft.com/office/powerpoint/2012/main" xmlns:p14="http://schemas.microsoft.com/office/powerpoint/2010/main" xmlns:com="http://schemas.openxmlformats.org/drawingml/2006/compatibility" xmlns:pvml="urn:schemas-microsoft-com:office:powerpoint" xmlns:v="urn:schemas-microsoft-com:vml" xmlns:o="urn:schemas-microsoft-com:office:office" xmlns:dgm="http://schemas.openxmlformats.org/drawingml/2006/diagram" xmlns:c="http://schemas.openxmlformats.org/drawingml/2006/chart" xmlns:mv="urn:schemas-microsoft-com:mac:vml" xmlns:mc="http://schemas.openxmlformats.org/markup-compatibility/2006" xmlns="" r:id="rId22" roundtripDataSignature="AMtx7mjOmBtk5DbvnkierGKxpb4ZbKw0WQ=="/>
+      <go:slidesCustomData xmlns="" xmlns:mc="http://schemas.openxmlformats.org/markup-compatibility/2006" xmlns:mv="urn:schemas-microsoft-com:mac:vml" xmlns:c="http://schemas.openxmlformats.org/drawingml/2006/chart" xmlns:dgm="http://schemas.openxmlformats.org/drawingml/2006/diagram" xmlns:o="urn:schemas-microsoft-com:office:office" xmlns:v="urn:schemas-microsoft-com:vml" xmlns:pvml="urn:schemas-microsoft-com:office:powerpoint" xmlns:com="http://schemas.openxmlformats.org/drawingml/2006/compatibility" xmlns:p14="http://schemas.microsoft.com/office/powerpoint/2010/main" xmlns:p15="http://schemas.microsoft.com/office/powerpoint/2012/main" xmlns:ahyp="http://schemas.microsoft.com/office/drawing/2018/hyperlinkcolor" xmlns:go="http://customooxmlschemas.google.com/" r:id="rId22" roundtripDataSignature="AMtx7mjOmBtk5DbvnkierGKxpb4ZbKw0WQ=="/>
     </p:ext>
   </p:extLst>
 </p:presentation>
@@ -11668,6 +11668,64 @@
           </a:p>
         </p:txBody>
       </p:sp>
+      <p:sp>
+        <p:nvSpPr>
+          <p:cNvPr id="10" name="Text 49">
+            <a:extLst>
+              <a:ext uri="{FF2B5EF4-FFF2-40B4-BE49-F238E27FC236}">
+                <a16:creationId xmlns:a16="http://schemas.microsoft.com/office/drawing/2014/main" id="{08F1DE7D-EEEB-D76E-A998-440BFC28D23A}"/>
+              </a:ext>
+            </a:extLst>
+          </p:cNvPr>
+          <p:cNvSpPr/>
+          <p:nvPr/>
+        </p:nvSpPr>
+        <p:spPr>
+          <a:xfrm>
+            <a:off x="1056298" y="6356350"/>
+            <a:ext cx="2296502" cy="365126"/>
+          </a:xfrm>
+          <a:prstGeom prst="rect">
+            <a:avLst/>
+          </a:prstGeom>
+          <a:noFill/>
+          <a:ln/>
+        </p:spPr>
+        <p:txBody>
+          <a:bodyPr wrap="square" lIns="0" tIns="0" rIns="0" bIns="0" rtlCol="0" anchor="ctr"/>
+          <a:lstStyle/>
+          <a:p>
+            <a:pPr marL="0" indent="0" algn="ctr">
+              <a:lnSpc>
+                <a:spcPct val="120000"/>
+              </a:lnSpc>
+              <a:buNone/>
+            </a:pPr>
+            <a:r>
+              <a:rPr lang="ar-EG" sz="1100" dirty="0">
+                <a:solidFill>
+                  <a:schemeClr val="tx2"/>
+                </a:solidFill>
+                <a:latin typeface="Calibri" panose="020F0502020204030204" pitchFamily="34" charset="0"/>
+                <a:ea typeface="Calibri" panose="020F0502020204030204" pitchFamily="34" charset="0"/>
+                <a:cs typeface="Calibri" panose="020F0502020204030204" pitchFamily="34" charset="0"/>
+              </a:rPr>
+              <a:t>11</a:t>
+            </a:r>
+            <a:r>
+              <a:rPr lang="en-US" sz="1100" dirty="0">
+                <a:solidFill>
+                  <a:schemeClr val="tx2"/>
+                </a:solidFill>
+                <a:latin typeface="Calibri" panose="020F0502020204030204" pitchFamily="34" charset="0"/>
+                <a:ea typeface="Calibri" panose="020F0502020204030204" pitchFamily="34" charset="0"/>
+                <a:cs typeface="Calibri" panose="020F0502020204030204" pitchFamily="34" charset="0"/>
+              </a:rPr>
+              <a:t>/07/2026</a:t>
+            </a:r>
+          </a:p>
+        </p:txBody>
+      </p:sp>
     </p:spTree>
     <p:extLst>
       <p:ext uri="{BB962C8B-B14F-4D97-AF65-F5344CB8AC3E}">
@@ -13000,6 +13058,64 @@
           </a:p>
         </p:txBody>
       </p:sp>
+      <p:sp>
+        <p:nvSpPr>
+          <p:cNvPr id="3" name="Text 49">
+            <a:extLst>
+              <a:ext uri="{FF2B5EF4-FFF2-40B4-BE49-F238E27FC236}">
+                <a16:creationId xmlns:a16="http://schemas.microsoft.com/office/drawing/2014/main" id="{6D7E93C4-B4E5-F5E4-5840-9F7DA087285C}"/>
+              </a:ext>
+            </a:extLst>
+          </p:cNvPr>
+          <p:cNvSpPr/>
+          <p:nvPr/>
+        </p:nvSpPr>
+        <p:spPr>
+          <a:xfrm>
+            <a:off x="1056298" y="6356350"/>
+            <a:ext cx="2296502" cy="365126"/>
+          </a:xfrm>
+          <a:prstGeom prst="rect">
+            <a:avLst/>
+          </a:prstGeom>
+          <a:noFill/>
+          <a:ln/>
+        </p:spPr>
+        <p:txBody>
+          <a:bodyPr wrap="square" lIns="0" tIns="0" rIns="0" bIns="0" rtlCol="0" anchor="ctr"/>
+          <a:lstStyle/>
+          <a:p>
+            <a:pPr marL="0" indent="0" algn="ctr">
+              <a:lnSpc>
+                <a:spcPct val="120000"/>
+              </a:lnSpc>
+              <a:buNone/>
+            </a:pPr>
+            <a:r>
+              <a:rPr lang="ar-EG" sz="1100" dirty="0">
+                <a:solidFill>
+                  <a:schemeClr val="tx2"/>
+                </a:solidFill>
+                <a:latin typeface="Calibri" panose="020F0502020204030204" pitchFamily="34" charset="0"/>
+                <a:ea typeface="Calibri" panose="020F0502020204030204" pitchFamily="34" charset="0"/>
+                <a:cs typeface="Calibri" panose="020F0502020204030204" pitchFamily="34" charset="0"/>
+              </a:rPr>
+              <a:t>11</a:t>
+            </a:r>
+            <a:r>
+              <a:rPr lang="en-US" sz="1100" dirty="0">
+                <a:solidFill>
+                  <a:schemeClr val="tx2"/>
+                </a:solidFill>
+                <a:latin typeface="Calibri" panose="020F0502020204030204" pitchFamily="34" charset="0"/>
+                <a:ea typeface="Calibri" panose="020F0502020204030204" pitchFamily="34" charset="0"/>
+                <a:cs typeface="Calibri" panose="020F0502020204030204" pitchFamily="34" charset="0"/>
+              </a:rPr>
+              <a:t>/07/2026</a:t>
+            </a:r>
+          </a:p>
+        </p:txBody>
+      </p:sp>
     </p:spTree>
   </p:cSld>
   <p:clrMapOvr>
@@ -14115,6 +14231,64 @@
                 <a:cs typeface="Calibri" panose="020F0502020204030204" pitchFamily="34" charset="0"/>
               </a:rPr>
               <a:t>F1 Score: 43.19%</a:t>
+            </a:r>
+          </a:p>
+        </p:txBody>
+      </p:sp>
+      <p:sp>
+        <p:nvSpPr>
+          <p:cNvPr id="6" name="Text 49">
+            <a:extLst>
+              <a:ext uri="{FF2B5EF4-FFF2-40B4-BE49-F238E27FC236}">
+                <a16:creationId xmlns:a16="http://schemas.microsoft.com/office/drawing/2014/main" id="{2749E7AB-F92C-CF3B-0A7A-2912DD5B324F}"/>
+              </a:ext>
+            </a:extLst>
+          </p:cNvPr>
+          <p:cNvSpPr/>
+          <p:nvPr/>
+        </p:nvSpPr>
+        <p:spPr>
+          <a:xfrm>
+            <a:off x="1056298" y="6356350"/>
+            <a:ext cx="2296502" cy="365126"/>
+          </a:xfrm>
+          <a:prstGeom prst="rect">
+            <a:avLst/>
+          </a:prstGeom>
+          <a:noFill/>
+          <a:ln/>
+        </p:spPr>
+        <p:txBody>
+          <a:bodyPr wrap="square" lIns="0" tIns="0" rIns="0" bIns="0" rtlCol="0" anchor="ctr"/>
+          <a:lstStyle/>
+          <a:p>
+            <a:pPr marL="0" indent="0" algn="ctr">
+              <a:lnSpc>
+                <a:spcPct val="120000"/>
+              </a:lnSpc>
+              <a:buNone/>
+            </a:pPr>
+            <a:r>
+              <a:rPr lang="ar-EG" sz="1100" dirty="0">
+                <a:solidFill>
+                  <a:schemeClr val="tx2"/>
+                </a:solidFill>
+                <a:latin typeface="Calibri" panose="020F0502020204030204" pitchFamily="34" charset="0"/>
+                <a:ea typeface="Calibri" panose="020F0502020204030204" pitchFamily="34" charset="0"/>
+                <a:cs typeface="Calibri" panose="020F0502020204030204" pitchFamily="34" charset="0"/>
+              </a:rPr>
+              <a:t>11</a:t>
+            </a:r>
+            <a:r>
+              <a:rPr lang="en-US" sz="1100" dirty="0">
+                <a:solidFill>
+                  <a:schemeClr val="tx2"/>
+                </a:solidFill>
+                <a:latin typeface="Calibri" panose="020F0502020204030204" pitchFamily="34" charset="0"/>
+                <a:ea typeface="Calibri" panose="020F0502020204030204" pitchFamily="34" charset="0"/>
+                <a:cs typeface="Calibri" panose="020F0502020204030204" pitchFamily="34" charset="0"/>
+              </a:rPr>
+              <a:t>/07/2026</a:t>
             </a:r>
           </a:p>
         </p:txBody>
@@ -15671,6 +15845,64 @@
           </a:p>
         </p:txBody>
       </p:sp>
+      <p:sp>
+        <p:nvSpPr>
+          <p:cNvPr id="6" name="Text 49">
+            <a:extLst>
+              <a:ext uri="{FF2B5EF4-FFF2-40B4-BE49-F238E27FC236}">
+                <a16:creationId xmlns:a16="http://schemas.microsoft.com/office/drawing/2014/main" id="{893DB3E4-8547-57D3-360D-DE3D541B2234}"/>
+              </a:ext>
+            </a:extLst>
+          </p:cNvPr>
+          <p:cNvSpPr/>
+          <p:nvPr/>
+        </p:nvSpPr>
+        <p:spPr>
+          <a:xfrm>
+            <a:off x="1056298" y="6356350"/>
+            <a:ext cx="2296502" cy="365126"/>
+          </a:xfrm>
+          <a:prstGeom prst="rect">
+            <a:avLst/>
+          </a:prstGeom>
+          <a:noFill/>
+          <a:ln/>
+        </p:spPr>
+        <p:txBody>
+          <a:bodyPr wrap="square" lIns="0" tIns="0" rIns="0" bIns="0" rtlCol="0" anchor="ctr"/>
+          <a:lstStyle/>
+          <a:p>
+            <a:pPr marL="0" indent="0" algn="ctr">
+              <a:lnSpc>
+                <a:spcPct val="120000"/>
+              </a:lnSpc>
+              <a:buNone/>
+            </a:pPr>
+            <a:r>
+              <a:rPr lang="ar-EG" sz="1100" dirty="0">
+                <a:solidFill>
+                  <a:schemeClr val="tx2"/>
+                </a:solidFill>
+                <a:latin typeface="Calibri" panose="020F0502020204030204" pitchFamily="34" charset="0"/>
+                <a:ea typeface="Calibri" panose="020F0502020204030204" pitchFamily="34" charset="0"/>
+                <a:cs typeface="Calibri" panose="020F0502020204030204" pitchFamily="34" charset="0"/>
+              </a:rPr>
+              <a:t>11</a:t>
+            </a:r>
+            <a:r>
+              <a:rPr lang="en-US" sz="1100" dirty="0">
+                <a:solidFill>
+                  <a:schemeClr val="tx2"/>
+                </a:solidFill>
+                <a:latin typeface="Calibri" panose="020F0502020204030204" pitchFamily="34" charset="0"/>
+                <a:ea typeface="Calibri" panose="020F0502020204030204" pitchFamily="34" charset="0"/>
+                <a:cs typeface="Calibri" panose="020F0502020204030204" pitchFamily="34" charset="0"/>
+              </a:rPr>
+              <a:t>/07/2026</a:t>
+            </a:r>
+          </a:p>
+        </p:txBody>
+      </p:sp>
     </p:spTree>
     <p:extLst>
       <p:ext uri="{BB962C8B-B14F-4D97-AF65-F5344CB8AC3E}">
@@ -16814,6 +17046,64 @@
           </a:p>
         </p:txBody>
       </p:sp>
+      <p:sp>
+        <p:nvSpPr>
+          <p:cNvPr id="5" name="Text 49">
+            <a:extLst>
+              <a:ext uri="{FF2B5EF4-FFF2-40B4-BE49-F238E27FC236}">
+                <a16:creationId xmlns:a16="http://schemas.microsoft.com/office/drawing/2014/main" id="{40A14595-46B3-6669-7C86-4C33D686BB7E}"/>
+              </a:ext>
+            </a:extLst>
+          </p:cNvPr>
+          <p:cNvSpPr/>
+          <p:nvPr/>
+        </p:nvSpPr>
+        <p:spPr>
+          <a:xfrm>
+            <a:off x="1056298" y="6356350"/>
+            <a:ext cx="2296502" cy="365126"/>
+          </a:xfrm>
+          <a:prstGeom prst="rect">
+            <a:avLst/>
+          </a:prstGeom>
+          <a:noFill/>
+          <a:ln/>
+        </p:spPr>
+        <p:txBody>
+          <a:bodyPr wrap="square" lIns="0" tIns="0" rIns="0" bIns="0" rtlCol="0" anchor="ctr"/>
+          <a:lstStyle/>
+          <a:p>
+            <a:pPr marL="0" indent="0" algn="ctr">
+              <a:lnSpc>
+                <a:spcPct val="120000"/>
+              </a:lnSpc>
+              <a:buNone/>
+            </a:pPr>
+            <a:r>
+              <a:rPr lang="ar-EG" sz="1100" dirty="0">
+                <a:solidFill>
+                  <a:schemeClr val="tx2"/>
+                </a:solidFill>
+                <a:latin typeface="Calibri" panose="020F0502020204030204" pitchFamily="34" charset="0"/>
+                <a:ea typeface="Calibri" panose="020F0502020204030204" pitchFamily="34" charset="0"/>
+                <a:cs typeface="Calibri" panose="020F0502020204030204" pitchFamily="34" charset="0"/>
+              </a:rPr>
+              <a:t>11</a:t>
+            </a:r>
+            <a:r>
+              <a:rPr lang="en-US" sz="1100" dirty="0">
+                <a:solidFill>
+                  <a:schemeClr val="tx2"/>
+                </a:solidFill>
+                <a:latin typeface="Calibri" panose="020F0502020204030204" pitchFamily="34" charset="0"/>
+                <a:ea typeface="Calibri" panose="020F0502020204030204" pitchFamily="34" charset="0"/>
+                <a:cs typeface="Calibri" panose="020F0502020204030204" pitchFamily="34" charset="0"/>
+              </a:rPr>
+              <a:t>/07/2026</a:t>
+            </a:r>
+          </a:p>
+        </p:txBody>
+      </p:sp>
     </p:spTree>
     <p:extLst>
       <p:ext uri="{BB962C8B-B14F-4D97-AF65-F5344CB8AC3E}">
@@ -17048,6 +17338,64 @@
           </a:ln>
         </p:spPr>
       </p:pic>
+      <p:sp>
+        <p:nvSpPr>
+          <p:cNvPr id="8" name="Text 49">
+            <a:extLst>
+              <a:ext uri="{FF2B5EF4-FFF2-40B4-BE49-F238E27FC236}">
+                <a16:creationId xmlns:a16="http://schemas.microsoft.com/office/drawing/2014/main" id="{7F966670-06F4-19E3-D33C-EB371AA0F13C}"/>
+              </a:ext>
+            </a:extLst>
+          </p:cNvPr>
+          <p:cNvSpPr/>
+          <p:nvPr/>
+        </p:nvSpPr>
+        <p:spPr>
+          <a:xfrm>
+            <a:off x="1056298" y="6356350"/>
+            <a:ext cx="2296502" cy="365126"/>
+          </a:xfrm>
+          <a:prstGeom prst="rect">
+            <a:avLst/>
+          </a:prstGeom>
+          <a:noFill/>
+          <a:ln/>
+        </p:spPr>
+        <p:txBody>
+          <a:bodyPr wrap="square" lIns="0" tIns="0" rIns="0" bIns="0" rtlCol="0" anchor="ctr"/>
+          <a:lstStyle/>
+          <a:p>
+            <a:pPr marL="0" indent="0" algn="ctr">
+              <a:lnSpc>
+                <a:spcPct val="120000"/>
+              </a:lnSpc>
+              <a:buNone/>
+            </a:pPr>
+            <a:r>
+              <a:rPr lang="ar-EG" sz="1100" dirty="0">
+                <a:solidFill>
+                  <a:schemeClr val="tx2"/>
+                </a:solidFill>
+                <a:latin typeface="Calibri" panose="020F0502020204030204" pitchFamily="34" charset="0"/>
+                <a:ea typeface="Calibri" panose="020F0502020204030204" pitchFamily="34" charset="0"/>
+                <a:cs typeface="Calibri" panose="020F0502020204030204" pitchFamily="34" charset="0"/>
+              </a:rPr>
+              <a:t>11</a:t>
+            </a:r>
+            <a:r>
+              <a:rPr lang="en-US" sz="1100" dirty="0">
+                <a:solidFill>
+                  <a:schemeClr val="tx2"/>
+                </a:solidFill>
+                <a:latin typeface="Calibri" panose="020F0502020204030204" pitchFamily="34" charset="0"/>
+                <a:ea typeface="Calibri" panose="020F0502020204030204" pitchFamily="34" charset="0"/>
+                <a:cs typeface="Calibri" panose="020F0502020204030204" pitchFamily="34" charset="0"/>
+              </a:rPr>
+              <a:t>/07/2026</a:t>
+            </a:r>
+          </a:p>
+        </p:txBody>
+      </p:sp>
     </p:spTree>
     <p:extLst>
       <p:ext uri="{BB962C8B-B14F-4D97-AF65-F5344CB8AC3E}">
@@ -17751,6 +18099,64 @@
           </a:p>
         </p:txBody>
       </p:sp>
+      <p:sp>
+        <p:nvSpPr>
+          <p:cNvPr id="19" name="Text 49">
+            <a:extLst>
+              <a:ext uri="{FF2B5EF4-FFF2-40B4-BE49-F238E27FC236}">
+                <a16:creationId xmlns:a16="http://schemas.microsoft.com/office/drawing/2014/main" id="{0172C963-691A-060B-1968-F6D97479ED19}"/>
+              </a:ext>
+            </a:extLst>
+          </p:cNvPr>
+          <p:cNvSpPr/>
+          <p:nvPr/>
+        </p:nvSpPr>
+        <p:spPr>
+          <a:xfrm>
+            <a:off x="1056298" y="6356350"/>
+            <a:ext cx="2296502" cy="365126"/>
+          </a:xfrm>
+          <a:prstGeom prst="rect">
+            <a:avLst/>
+          </a:prstGeom>
+          <a:noFill/>
+          <a:ln/>
+        </p:spPr>
+        <p:txBody>
+          <a:bodyPr wrap="square" lIns="0" tIns="0" rIns="0" bIns="0" rtlCol="0" anchor="ctr"/>
+          <a:lstStyle/>
+          <a:p>
+            <a:pPr marL="0" indent="0" algn="ctr">
+              <a:lnSpc>
+                <a:spcPct val="120000"/>
+              </a:lnSpc>
+              <a:buNone/>
+            </a:pPr>
+            <a:r>
+              <a:rPr lang="ar-EG" sz="1100" dirty="0">
+                <a:solidFill>
+                  <a:schemeClr val="tx2"/>
+                </a:solidFill>
+                <a:latin typeface="Calibri" panose="020F0502020204030204" pitchFamily="34" charset="0"/>
+                <a:ea typeface="Calibri" panose="020F0502020204030204" pitchFamily="34" charset="0"/>
+                <a:cs typeface="Calibri" panose="020F0502020204030204" pitchFamily="34" charset="0"/>
+              </a:rPr>
+              <a:t>11</a:t>
+            </a:r>
+            <a:r>
+              <a:rPr lang="en-US" sz="1100" dirty="0">
+                <a:solidFill>
+                  <a:schemeClr val="tx2"/>
+                </a:solidFill>
+                <a:latin typeface="Calibri" panose="020F0502020204030204" pitchFamily="34" charset="0"/>
+                <a:ea typeface="Calibri" panose="020F0502020204030204" pitchFamily="34" charset="0"/>
+                <a:cs typeface="Calibri" panose="020F0502020204030204" pitchFamily="34" charset="0"/>
+              </a:rPr>
+              <a:t>/07/2026</a:t>
+            </a:r>
+          </a:p>
+        </p:txBody>
+      </p:sp>
     </p:spTree>
     <p:extLst>
       <p:ext uri="{BB962C8B-B14F-4D97-AF65-F5344CB8AC3E}">
@@ -20545,6 +20951,64 @@
           </a:p>
         </p:txBody>
       </p:sp>
+      <p:sp>
+        <p:nvSpPr>
+          <p:cNvPr id="5" name="Text 49">
+            <a:extLst>
+              <a:ext uri="{FF2B5EF4-FFF2-40B4-BE49-F238E27FC236}">
+                <a16:creationId xmlns:a16="http://schemas.microsoft.com/office/drawing/2014/main" id="{16DF1895-9A57-C481-CA76-68111338CB41}"/>
+              </a:ext>
+            </a:extLst>
+          </p:cNvPr>
+          <p:cNvSpPr/>
+          <p:nvPr/>
+        </p:nvSpPr>
+        <p:spPr>
+          <a:xfrm>
+            <a:off x="1056298" y="6356350"/>
+            <a:ext cx="2296502" cy="365126"/>
+          </a:xfrm>
+          <a:prstGeom prst="rect">
+            <a:avLst/>
+          </a:prstGeom>
+          <a:noFill/>
+          <a:ln/>
+        </p:spPr>
+        <p:txBody>
+          <a:bodyPr wrap="square" lIns="0" tIns="0" rIns="0" bIns="0" rtlCol="0" anchor="ctr"/>
+          <a:lstStyle/>
+          <a:p>
+            <a:pPr marL="0" indent="0" algn="ctr">
+              <a:lnSpc>
+                <a:spcPct val="120000"/>
+              </a:lnSpc>
+              <a:buNone/>
+            </a:pPr>
+            <a:r>
+              <a:rPr lang="ar-EG" sz="1100" dirty="0">
+                <a:solidFill>
+                  <a:schemeClr val="tx2"/>
+                </a:solidFill>
+                <a:latin typeface="Calibri" panose="020F0502020204030204" pitchFamily="34" charset="0"/>
+                <a:ea typeface="Calibri" panose="020F0502020204030204" pitchFamily="34" charset="0"/>
+                <a:cs typeface="Calibri" panose="020F0502020204030204" pitchFamily="34" charset="0"/>
+              </a:rPr>
+              <a:t>11</a:t>
+            </a:r>
+            <a:r>
+              <a:rPr lang="en-US" sz="1100" dirty="0">
+                <a:solidFill>
+                  <a:schemeClr val="tx2"/>
+                </a:solidFill>
+                <a:latin typeface="Calibri" panose="020F0502020204030204" pitchFamily="34" charset="0"/>
+                <a:ea typeface="Calibri" panose="020F0502020204030204" pitchFamily="34" charset="0"/>
+                <a:cs typeface="Calibri" panose="020F0502020204030204" pitchFamily="34" charset="0"/>
+              </a:rPr>
+              <a:t>/07/2026</a:t>
+            </a:r>
+          </a:p>
+        </p:txBody>
+      </p:sp>
     </p:spTree>
     <p:extLst>
       <p:ext uri="{BB962C8B-B14F-4D97-AF65-F5344CB8AC3E}">
@@ -22694,6 +23158,64 @@
           </a:p>
         </p:txBody>
       </p:sp>
+      <p:sp>
+        <p:nvSpPr>
+          <p:cNvPr id="11" name="Text 49">
+            <a:extLst>
+              <a:ext uri="{FF2B5EF4-FFF2-40B4-BE49-F238E27FC236}">
+                <a16:creationId xmlns:a16="http://schemas.microsoft.com/office/drawing/2014/main" id="{1C51ACA0-6E0C-2303-092E-4F57E81A6A69}"/>
+              </a:ext>
+            </a:extLst>
+          </p:cNvPr>
+          <p:cNvSpPr/>
+          <p:nvPr/>
+        </p:nvSpPr>
+        <p:spPr>
+          <a:xfrm>
+            <a:off x="1056298" y="6356350"/>
+            <a:ext cx="2296502" cy="365126"/>
+          </a:xfrm>
+          <a:prstGeom prst="rect">
+            <a:avLst/>
+          </a:prstGeom>
+          <a:noFill/>
+          <a:ln/>
+        </p:spPr>
+        <p:txBody>
+          <a:bodyPr wrap="square" lIns="0" tIns="0" rIns="0" bIns="0" rtlCol="0" anchor="ctr"/>
+          <a:lstStyle/>
+          <a:p>
+            <a:pPr marL="0" indent="0" algn="ctr">
+              <a:lnSpc>
+                <a:spcPct val="120000"/>
+              </a:lnSpc>
+              <a:buNone/>
+            </a:pPr>
+            <a:r>
+              <a:rPr lang="ar-EG" sz="1100" dirty="0">
+                <a:solidFill>
+                  <a:schemeClr val="tx2"/>
+                </a:solidFill>
+                <a:latin typeface="Calibri" panose="020F0502020204030204" pitchFamily="34" charset="0"/>
+                <a:ea typeface="Calibri" panose="020F0502020204030204" pitchFamily="34" charset="0"/>
+                <a:cs typeface="Calibri" panose="020F0502020204030204" pitchFamily="34" charset="0"/>
+              </a:rPr>
+              <a:t>11</a:t>
+            </a:r>
+            <a:r>
+              <a:rPr lang="en-US" sz="1100" dirty="0">
+                <a:solidFill>
+                  <a:schemeClr val="tx2"/>
+                </a:solidFill>
+                <a:latin typeface="Calibri" panose="020F0502020204030204" pitchFamily="34" charset="0"/>
+                <a:ea typeface="Calibri" panose="020F0502020204030204" pitchFamily="34" charset="0"/>
+                <a:cs typeface="Calibri" panose="020F0502020204030204" pitchFamily="34" charset="0"/>
+              </a:rPr>
+              <a:t>/07/2026</a:t>
+            </a:r>
+          </a:p>
+        </p:txBody>
+      </p:sp>
     </p:spTree>
     <p:extLst>
       <p:ext uri="{BB962C8B-B14F-4D97-AF65-F5344CB8AC3E}">
@@ -22793,12 +23315,90 @@
           </a:ln>
         </p:spPr>
       </p:pic>
+      <p:sp>
+        <p:nvSpPr>
+          <p:cNvPr id="11" name="Text 6">
+            <a:extLst>
+              <a:ext uri="{FF2B5EF4-FFF2-40B4-BE49-F238E27FC236}">
+                <a16:creationId xmlns:a16="http://schemas.microsoft.com/office/drawing/2014/main" id="{73CD2534-1B7E-2425-3426-464D8EC696E4}"/>
+              </a:ext>
+            </a:extLst>
+          </p:cNvPr>
+          <p:cNvSpPr/>
+          <p:nvPr/>
+        </p:nvSpPr>
+        <p:spPr>
+          <a:xfrm>
+            <a:off x="320040" y="1051560"/>
+            <a:ext cx="11551615" cy="566928"/>
+          </a:xfrm>
+          <a:prstGeom prst="rect">
+            <a:avLst/>
+          </a:prstGeom>
+          <a:noFill/>
+          <a:ln/>
+        </p:spPr>
+        <p:txBody>
+          <a:bodyPr wrap="square" lIns="0" tIns="0" rIns="0" bIns="0" rtlCol="0" anchor="ctr"/>
+          <a:lstStyle/>
+          <a:p>
+            <a:pPr marL="0" indent="0">
+              <a:buNone/>
+            </a:pPr>
+            <a:r>
+              <a:rPr lang="en-US" sz="3000" b="1" dirty="0">
+                <a:solidFill>
+                  <a:srgbClr val="047954"/>
+                </a:solidFill>
+                <a:latin typeface="Calibri" pitchFamily="34" charset="0"/>
+                <a:ea typeface="Calibri" pitchFamily="34" charset="-122"/>
+                <a:cs typeface="Calibri" pitchFamily="34" charset="-120"/>
+              </a:rPr>
+              <a:t>Technical Architecture</a:t>
+            </a:r>
+            <a:endParaRPr lang="en-US" sz="3000" dirty="0"/>
+          </a:p>
+        </p:txBody>
+      </p:sp>
+      <p:sp>
+        <p:nvSpPr>
+          <p:cNvPr id="13" name="Shape 7">
+            <a:extLst>
+              <a:ext uri="{FF2B5EF4-FFF2-40B4-BE49-F238E27FC236}">
+                <a16:creationId xmlns:a16="http://schemas.microsoft.com/office/drawing/2014/main" id="{BA49C8F5-4693-1857-4711-821391057A19}"/>
+              </a:ext>
+            </a:extLst>
+          </p:cNvPr>
+          <p:cNvSpPr/>
+          <p:nvPr/>
+        </p:nvSpPr>
+        <p:spPr>
+          <a:xfrm>
+            <a:off x="338328" y="1645920"/>
+            <a:ext cx="822960" cy="54864"/>
+          </a:xfrm>
+          <a:prstGeom prst="rect">
+            <a:avLst/>
+          </a:prstGeom>
+          <a:solidFill>
+            <a:srgbClr val="D7B119"/>
+          </a:solidFill>
+          <a:ln/>
+        </p:spPr>
+        <p:txBody>
+          <a:bodyPr/>
+          <a:lstStyle/>
+          <a:p>
+            <a:endParaRPr lang="en-GB"/>
+          </a:p>
+        </p:txBody>
+      </p:sp>
       <p:pic>
         <p:nvPicPr>
-          <p:cNvPr id="9" name="Picture 8">
-            <a:extLst>
-              <a:ext uri="{FF2B5EF4-FFF2-40B4-BE49-F238E27FC236}">
-                <a16:creationId xmlns:a16="http://schemas.microsoft.com/office/drawing/2014/main" id="{008A4A1E-A2D5-E59D-2FC2-0445A21B7768}"/>
+          <p:cNvPr id="4" name="Picture 3">
+            <a:extLst>
+              <a:ext uri="{FF2B5EF4-FFF2-40B4-BE49-F238E27FC236}">
+                <a16:creationId xmlns:a16="http://schemas.microsoft.com/office/drawing/2014/main" id="{C386FD1E-1F5C-AF3C-B711-5EDBCA81677D}"/>
               </a:ext>
             </a:extLst>
           </p:cNvPr>
@@ -22815,8 +23415,8 @@
         </p:blipFill>
         <p:spPr>
           <a:xfrm>
-            <a:off x="826783" y="1865868"/>
-            <a:ext cx="7578383" cy="4287115"/>
+            <a:off x="1122794" y="1809094"/>
+            <a:ext cx="9946105" cy="4356649"/>
           </a:xfrm>
           <a:prstGeom prst="rect">
             <a:avLst/>
@@ -22825,20 +23425,20 @@
       </p:pic>
       <p:sp>
         <p:nvSpPr>
-          <p:cNvPr id="11" name="Text 6">
-            <a:extLst>
-              <a:ext uri="{FF2B5EF4-FFF2-40B4-BE49-F238E27FC236}">
-                <a16:creationId xmlns:a16="http://schemas.microsoft.com/office/drawing/2014/main" id="{73CD2534-1B7E-2425-3426-464D8EC696E4}"/>
-              </a:ext>
-            </a:extLst>
-          </p:cNvPr>
-          <p:cNvSpPr/>
-          <p:nvPr/>
-        </p:nvSpPr>
-        <p:spPr>
-          <a:xfrm>
-            <a:off x="320040" y="1051560"/>
-            <a:ext cx="11551615" cy="566928"/>
+          <p:cNvPr id="7" name="Text 49">
+            <a:extLst>
+              <a:ext uri="{FF2B5EF4-FFF2-40B4-BE49-F238E27FC236}">
+                <a16:creationId xmlns:a16="http://schemas.microsoft.com/office/drawing/2014/main" id="{7DB0BBFB-E639-BDC4-FAF2-1A957A363523}"/>
+              </a:ext>
+            </a:extLst>
+          </p:cNvPr>
+          <p:cNvSpPr/>
+          <p:nvPr/>
+        </p:nvSpPr>
+        <p:spPr>
+          <a:xfrm>
+            <a:off x="1056298" y="6356350"/>
+            <a:ext cx="2296502" cy="365126"/>
           </a:xfrm>
           <a:prstGeom prst="rect">
             <a:avLst/>
@@ -22850,250 +23450,34 @@
           <a:bodyPr wrap="square" lIns="0" tIns="0" rIns="0" bIns="0" rtlCol="0" anchor="ctr"/>
           <a:lstStyle/>
           <a:p>
-            <a:pPr marL="0" indent="0">
+            <a:pPr marL="0" indent="0" algn="ctr">
+              <a:lnSpc>
+                <a:spcPct val="120000"/>
+              </a:lnSpc>
               <a:buNone/>
             </a:pPr>
             <a:r>
-              <a:rPr lang="en-US" sz="3000" b="1" dirty="0">
-                <a:solidFill>
-                  <a:srgbClr val="047954"/>
-                </a:solidFill>
-                <a:latin typeface="Calibri" pitchFamily="34" charset="0"/>
-                <a:ea typeface="Calibri" pitchFamily="34" charset="-122"/>
-                <a:cs typeface="Calibri" pitchFamily="34" charset="-120"/>
-              </a:rPr>
-              <a:t>Technical Architecture</a:t>
-            </a:r>
-            <a:endParaRPr lang="en-US" sz="3000" dirty="0"/>
-          </a:p>
-        </p:txBody>
-      </p:sp>
-      <p:sp>
-        <p:nvSpPr>
-          <p:cNvPr id="13" name="Shape 7">
-            <a:extLst>
-              <a:ext uri="{FF2B5EF4-FFF2-40B4-BE49-F238E27FC236}">
-                <a16:creationId xmlns:a16="http://schemas.microsoft.com/office/drawing/2014/main" id="{BA49C8F5-4693-1857-4711-821391057A19}"/>
-              </a:ext>
-            </a:extLst>
-          </p:cNvPr>
-          <p:cNvSpPr/>
-          <p:nvPr/>
-        </p:nvSpPr>
-        <p:spPr>
-          <a:xfrm>
-            <a:off x="338328" y="1645920"/>
-            <a:ext cx="822960" cy="54864"/>
-          </a:xfrm>
-          <a:prstGeom prst="rect">
-            <a:avLst/>
-          </a:prstGeom>
-          <a:solidFill>
-            <a:srgbClr val="D7B119"/>
-          </a:solidFill>
-          <a:ln/>
-        </p:spPr>
-        <p:txBody>
-          <a:bodyPr/>
-          <a:lstStyle/>
-          <a:p>
-            <a:endParaRPr lang="en-GB"/>
-          </a:p>
-        </p:txBody>
-      </p:sp>
-      <p:sp>
-        <p:nvSpPr>
-          <p:cNvPr id="15" name="CardBg120">
-            <a:extLst>
-              <a:ext uri="{FF2B5EF4-FFF2-40B4-BE49-F238E27FC236}">
-                <a16:creationId xmlns:a16="http://schemas.microsoft.com/office/drawing/2014/main" id="{E7DA41CB-AB22-8DCE-FAF4-59C30A1B5B64}"/>
-              </a:ext>
-            </a:extLst>
-          </p:cNvPr>
-          <p:cNvSpPr/>
-          <p:nvPr/>
-        </p:nvSpPr>
-        <p:spPr>
-          <a:xfrm>
-            <a:off x="8610600" y="1865868"/>
-            <a:ext cx="2849781" cy="4287114"/>
-          </a:xfrm>
-          <a:prstGeom prst="rect">
-            <a:avLst/>
-          </a:prstGeom>
-          <a:solidFill>
-            <a:srgbClr val="FDF6E3"/>
-          </a:solidFill>
-          <a:ln w="9525">
-            <a:solidFill>
-              <a:srgbClr val="336EA8"/>
-            </a:solidFill>
-          </a:ln>
-        </p:spPr>
-        <p:txBody>
-          <a:bodyPr/>
-          <a:lstStyle/>
-          <a:p>
-            <a:endParaRPr lang="en-US" sz="1800" dirty="0">
-              <a:latin typeface="Calibri" panose="020F0502020204030204" pitchFamily="34" charset="0"/>
-              <a:ea typeface="Calibri" panose="020F0502020204030204" pitchFamily="34" charset="0"/>
-              <a:cs typeface="Calibri" panose="020F0502020204030204" pitchFamily="34" charset="0"/>
-            </a:endParaRPr>
-          </a:p>
-        </p:txBody>
-      </p:sp>
-      <p:sp>
-        <p:nvSpPr>
-          <p:cNvPr id="17" name="CardHdr120">
-            <a:extLst>
-              <a:ext uri="{FF2B5EF4-FFF2-40B4-BE49-F238E27FC236}">
-                <a16:creationId xmlns:a16="http://schemas.microsoft.com/office/drawing/2014/main" id="{68ABBF77-0123-8726-7403-56668374DCE8}"/>
-              </a:ext>
-            </a:extLst>
-          </p:cNvPr>
-          <p:cNvSpPr/>
-          <p:nvPr/>
-        </p:nvSpPr>
-        <p:spPr>
-          <a:xfrm>
-            <a:off x="8610600" y="1874861"/>
-            <a:ext cx="2849781" cy="97985"/>
-          </a:xfrm>
-          <a:prstGeom prst="rect">
-            <a:avLst/>
-          </a:prstGeom>
-          <a:solidFill>
-            <a:srgbClr val="336EA8"/>
-          </a:solidFill>
-          <a:ln/>
-        </p:spPr>
-        <p:txBody>
-          <a:bodyPr/>
-          <a:lstStyle/>
-          <a:p>
-            <a:endParaRPr lang="en-US" sz="3600">
-              <a:latin typeface="Calibri" panose="020F0502020204030204" pitchFamily="34" charset="0"/>
-              <a:ea typeface="Calibri" panose="020F0502020204030204" pitchFamily="34" charset="0"/>
-              <a:cs typeface="Calibri" panose="020F0502020204030204" pitchFamily="34" charset="0"/>
-            </a:endParaRPr>
-          </a:p>
-        </p:txBody>
-      </p:sp>
-      <p:sp>
-        <p:nvSpPr>
-          <p:cNvPr id="23" name="TextBox 22">
-            <a:extLst>
-              <a:ext uri="{FF2B5EF4-FFF2-40B4-BE49-F238E27FC236}">
-                <a16:creationId xmlns:a16="http://schemas.microsoft.com/office/drawing/2014/main" id="{920721C7-DC07-6BD7-5046-3FE3DA550867}"/>
-              </a:ext>
-            </a:extLst>
-          </p:cNvPr>
-          <p:cNvSpPr txBox="1"/>
-          <p:nvPr/>
-        </p:nvSpPr>
-        <p:spPr>
-          <a:xfrm>
-            <a:off x="8663890" y="2110988"/>
-            <a:ext cx="2743200" cy="3573286"/>
-          </a:xfrm>
-          <a:prstGeom prst="rect">
-            <a:avLst/>
-          </a:prstGeom>
-          <a:noFill/>
-        </p:spPr>
-        <p:txBody>
-          <a:bodyPr wrap="square">
-            <a:spAutoFit/>
-          </a:bodyPr>
-          <a:lstStyle/>
-          <a:p>
-            <a:pPr marL="285750" indent="-285750">
-              <a:buFont typeface="Arial" panose="020B0604020202020204" pitchFamily="34" charset="0"/>
-              <a:buChar char="•"/>
-            </a:pPr>
-            <a:r>
-              <a:rPr lang="en-GB" sz="1740" dirty="0">
+              <a:rPr lang="ar-EG" sz="1100" dirty="0">
+                <a:solidFill>
+                  <a:schemeClr val="tx2"/>
+                </a:solidFill>
                 <a:latin typeface="Calibri" panose="020F0502020204030204" pitchFamily="34" charset="0"/>
                 <a:ea typeface="Calibri" panose="020F0502020204030204" pitchFamily="34" charset="0"/>
                 <a:cs typeface="Calibri" panose="020F0502020204030204" pitchFamily="34" charset="0"/>
               </a:rPr>
-              <a:t>Data ingestion from Excel dataset. </a:t>
+              <a:t>11</a:t>
             </a:r>
-          </a:p>
-          <a:p>
-            <a:pPr marL="285750" indent="-285750">
-              <a:buFont typeface="Arial" panose="020B0604020202020204" pitchFamily="34" charset="0"/>
-              <a:buChar char="•"/>
-            </a:pPr>
             <a:r>
-              <a:rPr lang="en-GB" sz="1740" dirty="0">
+              <a:rPr lang="en-US" sz="1100" dirty="0">
+                <a:solidFill>
+                  <a:schemeClr val="tx2"/>
+                </a:solidFill>
                 <a:latin typeface="Calibri" panose="020F0502020204030204" pitchFamily="34" charset="0"/>
                 <a:ea typeface="Calibri" panose="020F0502020204030204" pitchFamily="34" charset="0"/>
                 <a:cs typeface="Calibri" panose="020F0502020204030204" pitchFamily="34" charset="0"/>
               </a:rPr>
-              <a:t>Data transformation using Medallion Architecture. </a:t>
+              <a:t>/07/2026</a:t>
             </a:r>
-          </a:p>
-          <a:p>
-            <a:pPr marL="285750" indent="-285750">
-              <a:buFont typeface="Arial" panose="020B0604020202020204" pitchFamily="34" charset="0"/>
-              <a:buChar char="•"/>
-            </a:pPr>
-            <a:r>
-              <a:rPr lang="en-GB" sz="1740" dirty="0">
-                <a:latin typeface="Calibri" panose="020F0502020204030204" pitchFamily="34" charset="0"/>
-                <a:ea typeface="Calibri" panose="020F0502020204030204" pitchFamily="34" charset="0"/>
-                <a:cs typeface="Calibri" panose="020F0502020204030204" pitchFamily="34" charset="0"/>
-              </a:rPr>
-              <a:t>Star Schema data warehouse design. </a:t>
-            </a:r>
-          </a:p>
-          <a:p>
-            <a:pPr marL="285750" indent="-285750">
-              <a:buFont typeface="Arial" panose="020B0604020202020204" pitchFamily="34" charset="0"/>
-              <a:buChar char="•"/>
-            </a:pPr>
-            <a:r>
-              <a:rPr lang="en-GB" sz="1740" dirty="0">
-                <a:latin typeface="Calibri" panose="020F0502020204030204" pitchFamily="34" charset="0"/>
-                <a:ea typeface="Calibri" panose="020F0502020204030204" pitchFamily="34" charset="0"/>
-                <a:cs typeface="Calibri" panose="020F0502020204030204" pitchFamily="34" charset="0"/>
-              </a:rPr>
-              <a:t>Semantic model creation (relationships &amp; KPIs). </a:t>
-            </a:r>
-          </a:p>
-          <a:p>
-            <a:pPr marL="285750" indent="-285750">
-              <a:buFont typeface="Arial" panose="020B0604020202020204" pitchFamily="34" charset="0"/>
-              <a:buChar char="•"/>
-            </a:pPr>
-            <a:r>
-              <a:rPr lang="en-GB" sz="1740" dirty="0">
-                <a:latin typeface="Calibri" panose="020F0502020204030204" pitchFamily="34" charset="0"/>
-                <a:ea typeface="Calibri" panose="020F0502020204030204" pitchFamily="34" charset="0"/>
-                <a:cs typeface="Calibri" panose="020F0502020204030204" pitchFamily="34" charset="0"/>
-              </a:rPr>
-              <a:t>Interactive Power BI reporting. </a:t>
-            </a:r>
-          </a:p>
-          <a:p>
-            <a:pPr marL="285750" indent="-285750">
-              <a:buFont typeface="Arial" panose="020B0604020202020204" pitchFamily="34" charset="0"/>
-              <a:buChar char="•"/>
-            </a:pPr>
-            <a:r>
-              <a:rPr lang="en-GB" sz="1740" dirty="0">
-                <a:latin typeface="Calibri" panose="020F0502020204030204" pitchFamily="34" charset="0"/>
-                <a:ea typeface="Calibri" panose="020F0502020204030204" pitchFamily="34" charset="0"/>
-                <a:cs typeface="Calibri" panose="020F0502020204030204" pitchFamily="34" charset="0"/>
-              </a:rPr>
-              <a:t>Data quality and governance.</a:t>
-            </a:r>
-            <a:endParaRPr lang="en-US" sz="1740" dirty="0">
-              <a:latin typeface="Calibri" panose="020F0502020204030204" pitchFamily="34" charset="0"/>
-              <a:ea typeface="Calibri" panose="020F0502020204030204" pitchFamily="34" charset="0"/>
-              <a:cs typeface="Calibri" panose="020F0502020204030204" pitchFamily="34" charset="0"/>
-            </a:endParaRPr>
           </a:p>
         </p:txBody>
       </p:sp>
@@ -24925,6 +25309,64 @@
           </a:p>
         </p:txBody>
       </p:sp>
+      <p:sp>
+        <p:nvSpPr>
+          <p:cNvPr id="5" name="Text 49">
+            <a:extLst>
+              <a:ext uri="{FF2B5EF4-FFF2-40B4-BE49-F238E27FC236}">
+                <a16:creationId xmlns:a16="http://schemas.microsoft.com/office/drawing/2014/main" id="{84CD0624-5BB3-0FC9-41CB-36A9F75729E6}"/>
+              </a:ext>
+            </a:extLst>
+          </p:cNvPr>
+          <p:cNvSpPr/>
+          <p:nvPr/>
+        </p:nvSpPr>
+        <p:spPr>
+          <a:xfrm>
+            <a:off x="1056298" y="6356350"/>
+            <a:ext cx="2296502" cy="365126"/>
+          </a:xfrm>
+          <a:prstGeom prst="rect">
+            <a:avLst/>
+          </a:prstGeom>
+          <a:noFill/>
+          <a:ln/>
+        </p:spPr>
+        <p:txBody>
+          <a:bodyPr wrap="square" lIns="0" tIns="0" rIns="0" bIns="0" rtlCol="0" anchor="ctr"/>
+          <a:lstStyle/>
+          <a:p>
+            <a:pPr marL="0" indent="0" algn="ctr">
+              <a:lnSpc>
+                <a:spcPct val="120000"/>
+              </a:lnSpc>
+              <a:buNone/>
+            </a:pPr>
+            <a:r>
+              <a:rPr lang="ar-EG" sz="1100" dirty="0">
+                <a:solidFill>
+                  <a:schemeClr val="tx2"/>
+                </a:solidFill>
+                <a:latin typeface="Calibri" panose="020F0502020204030204" pitchFamily="34" charset="0"/>
+                <a:ea typeface="Calibri" panose="020F0502020204030204" pitchFamily="34" charset="0"/>
+                <a:cs typeface="Calibri" panose="020F0502020204030204" pitchFamily="34" charset="0"/>
+              </a:rPr>
+              <a:t>11</a:t>
+            </a:r>
+            <a:r>
+              <a:rPr lang="en-US" sz="1100" dirty="0">
+                <a:solidFill>
+                  <a:schemeClr val="tx2"/>
+                </a:solidFill>
+                <a:latin typeface="Calibri" panose="020F0502020204030204" pitchFamily="34" charset="0"/>
+                <a:ea typeface="Calibri" panose="020F0502020204030204" pitchFamily="34" charset="0"/>
+                <a:cs typeface="Calibri" panose="020F0502020204030204" pitchFamily="34" charset="0"/>
+              </a:rPr>
+              <a:t>/07/2026</a:t>
+            </a:r>
+          </a:p>
+        </p:txBody>
+      </p:sp>
     </p:spTree>
     <p:extLst>
       <p:ext uri="{BB962C8B-B14F-4D97-AF65-F5344CB8AC3E}">
@@ -26466,6 +26908,64 @@
               <a:ea typeface="Calibri" panose="020F0502020204030204" pitchFamily="34" charset="0"/>
               <a:cs typeface="Calibri" panose="020F0502020204030204" pitchFamily="34" charset="0"/>
             </a:endParaRPr>
+          </a:p>
+        </p:txBody>
+      </p:sp>
+      <p:sp>
+        <p:nvSpPr>
+          <p:cNvPr id="8" name="Text 49">
+            <a:extLst>
+              <a:ext uri="{FF2B5EF4-FFF2-40B4-BE49-F238E27FC236}">
+                <a16:creationId xmlns:a16="http://schemas.microsoft.com/office/drawing/2014/main" id="{6A56C70E-4142-F2EA-45BB-8968C2ED3974}"/>
+              </a:ext>
+            </a:extLst>
+          </p:cNvPr>
+          <p:cNvSpPr/>
+          <p:nvPr/>
+        </p:nvSpPr>
+        <p:spPr>
+          <a:xfrm>
+            <a:off x="1056298" y="6356350"/>
+            <a:ext cx="2296502" cy="365126"/>
+          </a:xfrm>
+          <a:prstGeom prst="rect">
+            <a:avLst/>
+          </a:prstGeom>
+          <a:noFill/>
+          <a:ln/>
+        </p:spPr>
+        <p:txBody>
+          <a:bodyPr wrap="square" lIns="0" tIns="0" rIns="0" bIns="0" rtlCol="0" anchor="ctr"/>
+          <a:lstStyle/>
+          <a:p>
+            <a:pPr marL="0" indent="0" algn="ctr">
+              <a:lnSpc>
+                <a:spcPct val="120000"/>
+              </a:lnSpc>
+              <a:buNone/>
+            </a:pPr>
+            <a:r>
+              <a:rPr lang="ar-EG" sz="1100" dirty="0">
+                <a:solidFill>
+                  <a:schemeClr val="tx2"/>
+                </a:solidFill>
+                <a:latin typeface="Calibri" panose="020F0502020204030204" pitchFamily="34" charset="0"/>
+                <a:ea typeface="Calibri" panose="020F0502020204030204" pitchFamily="34" charset="0"/>
+                <a:cs typeface="Calibri" panose="020F0502020204030204" pitchFamily="34" charset="0"/>
+              </a:rPr>
+              <a:t>11</a:t>
+            </a:r>
+            <a:r>
+              <a:rPr lang="en-US" sz="1100" dirty="0">
+                <a:solidFill>
+                  <a:schemeClr val="tx2"/>
+                </a:solidFill>
+                <a:latin typeface="Calibri" panose="020F0502020204030204" pitchFamily="34" charset="0"/>
+                <a:ea typeface="Calibri" panose="020F0502020204030204" pitchFamily="34" charset="0"/>
+                <a:cs typeface="Calibri" panose="020F0502020204030204" pitchFamily="34" charset="0"/>
+              </a:rPr>
+              <a:t>/07/2026</a:t>
+            </a:r>
           </a:p>
         </p:txBody>
       </p:sp>
@@ -28607,6 +29107,64 @@
               <a:ea typeface="Calibri" panose="020F0502020204030204" pitchFamily="34" charset="0"/>
               <a:cs typeface="Calibri" panose="020F0502020204030204" pitchFamily="34" charset="0"/>
             </a:endParaRPr>
+          </a:p>
+        </p:txBody>
+      </p:sp>
+      <p:sp>
+        <p:nvSpPr>
+          <p:cNvPr id="26" name="Text 49">
+            <a:extLst>
+              <a:ext uri="{FF2B5EF4-FFF2-40B4-BE49-F238E27FC236}">
+                <a16:creationId xmlns:a16="http://schemas.microsoft.com/office/drawing/2014/main" id="{BD88F6A2-2B1D-FA34-B364-50C5AD90C98D}"/>
+              </a:ext>
+            </a:extLst>
+          </p:cNvPr>
+          <p:cNvSpPr/>
+          <p:nvPr/>
+        </p:nvSpPr>
+        <p:spPr>
+          <a:xfrm>
+            <a:off x="1056298" y="6356350"/>
+            <a:ext cx="2296502" cy="365126"/>
+          </a:xfrm>
+          <a:prstGeom prst="rect">
+            <a:avLst/>
+          </a:prstGeom>
+          <a:noFill/>
+          <a:ln/>
+        </p:spPr>
+        <p:txBody>
+          <a:bodyPr wrap="square" lIns="0" tIns="0" rIns="0" bIns="0" rtlCol="0" anchor="ctr"/>
+          <a:lstStyle/>
+          <a:p>
+            <a:pPr marL="0" indent="0" algn="ctr">
+              <a:lnSpc>
+                <a:spcPct val="120000"/>
+              </a:lnSpc>
+              <a:buNone/>
+            </a:pPr>
+            <a:r>
+              <a:rPr lang="ar-EG" sz="1100" dirty="0">
+                <a:solidFill>
+                  <a:schemeClr val="tx2"/>
+                </a:solidFill>
+                <a:latin typeface="Calibri" panose="020F0502020204030204" pitchFamily="34" charset="0"/>
+                <a:ea typeface="Calibri" panose="020F0502020204030204" pitchFamily="34" charset="0"/>
+                <a:cs typeface="Calibri" panose="020F0502020204030204" pitchFamily="34" charset="0"/>
+              </a:rPr>
+              <a:t>11</a:t>
+            </a:r>
+            <a:r>
+              <a:rPr lang="en-US" sz="1100" dirty="0">
+                <a:solidFill>
+                  <a:schemeClr val="tx2"/>
+                </a:solidFill>
+                <a:latin typeface="Calibri" panose="020F0502020204030204" pitchFamily="34" charset="0"/>
+                <a:ea typeface="Calibri" panose="020F0502020204030204" pitchFamily="34" charset="0"/>
+                <a:cs typeface="Calibri" panose="020F0502020204030204" pitchFamily="34" charset="0"/>
+              </a:rPr>
+              <a:t>/07/2026</a:t>
+            </a:r>
           </a:p>
         </p:txBody>
       </p:sp>
@@ -29443,6 +30001,64 @@
               <a:t>9</a:t>
             </a:fld>
             <a:endParaRPr lang="en-US" dirty="0"/>
+          </a:p>
+        </p:txBody>
+      </p:sp>
+      <p:sp>
+        <p:nvSpPr>
+          <p:cNvPr id="3" name="Text 49">
+            <a:extLst>
+              <a:ext uri="{FF2B5EF4-FFF2-40B4-BE49-F238E27FC236}">
+                <a16:creationId xmlns:a16="http://schemas.microsoft.com/office/drawing/2014/main" id="{A392B6BC-6DED-E5AE-FB1A-6BA9B9BBD5F7}"/>
+              </a:ext>
+            </a:extLst>
+          </p:cNvPr>
+          <p:cNvSpPr/>
+          <p:nvPr/>
+        </p:nvSpPr>
+        <p:spPr>
+          <a:xfrm>
+            <a:off x="1056298" y="6356350"/>
+            <a:ext cx="2296502" cy="365126"/>
+          </a:xfrm>
+          <a:prstGeom prst="rect">
+            <a:avLst/>
+          </a:prstGeom>
+          <a:noFill/>
+          <a:ln/>
+        </p:spPr>
+        <p:txBody>
+          <a:bodyPr wrap="square" lIns="0" tIns="0" rIns="0" bIns="0" rtlCol="0" anchor="ctr"/>
+          <a:lstStyle/>
+          <a:p>
+            <a:pPr marL="0" indent="0" algn="ctr">
+              <a:lnSpc>
+                <a:spcPct val="120000"/>
+              </a:lnSpc>
+              <a:buNone/>
+            </a:pPr>
+            <a:r>
+              <a:rPr lang="ar-EG" sz="1100" dirty="0">
+                <a:solidFill>
+                  <a:schemeClr val="tx2"/>
+                </a:solidFill>
+                <a:latin typeface="Calibri" panose="020F0502020204030204" pitchFamily="34" charset="0"/>
+                <a:ea typeface="Calibri" panose="020F0502020204030204" pitchFamily="34" charset="0"/>
+                <a:cs typeface="Calibri" panose="020F0502020204030204" pitchFamily="34" charset="0"/>
+              </a:rPr>
+              <a:t>11</a:t>
+            </a:r>
+            <a:r>
+              <a:rPr lang="en-US" sz="1100" dirty="0">
+                <a:solidFill>
+                  <a:schemeClr val="tx2"/>
+                </a:solidFill>
+                <a:latin typeface="Calibri" panose="020F0502020204030204" pitchFamily="34" charset="0"/>
+                <a:ea typeface="Calibri" panose="020F0502020204030204" pitchFamily="34" charset="0"/>
+                <a:cs typeface="Calibri" panose="020F0502020204030204" pitchFamily="34" charset="0"/>
+              </a:rPr>
+              <a:t>/07/2026</a:t>
+            </a:r>
           </a:p>
         </p:txBody>
       </p:sp>
